--- a/Plan_Reporting_Custom_Prinsiple_ESA.pptx
+++ b/Plan_Reporting_Custom_Prinsiple_ESA.pptx
@@ -5,21 +5,21 @@
     <p:sldMasterId id="2147483648" r:id="rId1"/>
   </p:sldMasterIdLst>
   <p:sldIdLst>
-    <p:sldId id="256" r:id="rId7"/>
-    <p:sldId id="257" r:id="rId8"/>
-    <p:sldId id="258" r:id="rId9"/>
-    <p:sldId id="259" r:id="rId10"/>
-    <p:sldId id="260" r:id="rId11"/>
-    <p:sldId id="261" r:id="rId12"/>
-    <p:sldId id="262" r:id="rId13"/>
-    <p:sldId id="263" r:id="rId14"/>
-    <p:sldId id="264" r:id="rId15"/>
-    <p:sldId id="265" r:id="rId16"/>
-    <p:sldId id="266" r:id="rId17"/>
-    <p:sldId id="267" r:id="rId18"/>
-    <p:sldId id="268" r:id="rId19"/>
+    <p:sldId id="256" r:id="rId2"/>
+    <p:sldId id="257" r:id="rId3"/>
+    <p:sldId id="258" r:id="rId4"/>
+    <p:sldId id="259" r:id="rId5"/>
+    <p:sldId id="260" r:id="rId6"/>
+    <p:sldId id="261" r:id="rId7"/>
+    <p:sldId id="262" r:id="rId8"/>
+    <p:sldId id="263" r:id="rId9"/>
+    <p:sldId id="264" r:id="rId10"/>
+    <p:sldId id="265" r:id="rId11"/>
+    <p:sldId id="266" r:id="rId12"/>
+    <p:sldId id="267" r:id="rId13"/>
+    <p:sldId id="268" r:id="rId14"/>
   </p:sldIdLst>
-  <p:sldSz cx="12191695" cy="6858000" type="screen4x3"/>
+  <p:sldSz cx="12192000" cy="6858000"/>
   <p:notesSz cx="6858000" cy="9144000"/>
   <p:defaultTextStyle>
     <a:defPPr>
@@ -116,6 +116,22 @@
       </a:defRPr>
     </a:lvl9pPr>
   </p:defaultTextStyle>
+  <p:extLst>
+    <p:ext uri="{EFAFB233-063F-42B5-8137-9DF3F51BA10A}">
+      <p15:sldGuideLst xmlns:p15="http://schemas.microsoft.com/office/powerpoint/2012/main">
+        <p15:guide id="1" orient="horz" pos="2160">
+          <p15:clr>
+            <a:srgbClr val="A4A3A4"/>
+          </p15:clr>
+        </p15:guide>
+        <p15:guide id="2" pos="2880">
+          <p15:clr>
+            <a:srgbClr val="A4A3A4"/>
+          </p15:clr>
+        </p15:guide>
+      </p15:sldGuideLst>
+    </p:ext>
+  </p:extLst>
 </p:presentation>
 </file>
 
@@ -157,10 +173,9 @@
           <a:lstStyle/>
           <a:p>
             <a:r>
-              <a:rPr lang="en-US" smtClean="0"/>
+              <a:rPr lang="en-US"/>
               <a:t>Click to edit Master title style</a:t>
             </a:r>
-            <a:endParaRPr lang="en-US"/>
           </a:p>
         </p:txBody>
       </p:sp>
@@ -276,10 +291,9 @@
           </a:lstStyle>
           <a:p>
             <a:r>
-              <a:rPr lang="en-US" smtClean="0"/>
+              <a:rPr lang="en-US"/>
               <a:t>Click to edit Master subtitle style</a:t>
             </a:r>
-            <a:endParaRPr lang="en-US"/>
           </a:p>
         </p:txBody>
       </p:sp>
@@ -300,7 +314,7 @@
           <a:p>
             <a:fld id="{5BCAD085-E8A6-8845-BD4E-CB4CCA059FC4}" type="datetimeFigureOut">
               <a:rPr lang="en-US" smtClean="0"/>
-              <a:t>1/27/13</a:t>
+              <a:t>8/24/2026</a:t>
             </a:fld>
             <a:endParaRPr lang="en-US"/>
           </a:p>
@@ -394,10 +408,9 @@
           <a:lstStyle/>
           <a:p>
             <a:r>
-              <a:rPr lang="en-US" smtClean="0"/>
+              <a:rPr lang="en-US"/>
               <a:t>Click to edit Master title style</a:t>
             </a:r>
-            <a:endParaRPr lang="en-US"/>
           </a:p>
         </p:txBody>
       </p:sp>
@@ -418,38 +431,37 @@
           <a:p>
             <a:pPr lvl="0"/>
             <a:r>
-              <a:rPr lang="en-US" smtClean="0"/>
+              <a:rPr lang="en-US"/>
               <a:t>Click to edit Master text styles</a:t>
             </a:r>
           </a:p>
           <a:p>
             <a:pPr lvl="1"/>
             <a:r>
-              <a:rPr lang="en-US" smtClean="0"/>
+              <a:rPr lang="en-US"/>
               <a:t>Second level</a:t>
             </a:r>
           </a:p>
           <a:p>
             <a:pPr lvl="2"/>
             <a:r>
-              <a:rPr lang="en-US" smtClean="0"/>
+              <a:rPr lang="en-US"/>
               <a:t>Third level</a:t>
             </a:r>
           </a:p>
           <a:p>
             <a:pPr lvl="3"/>
             <a:r>
-              <a:rPr lang="en-US" smtClean="0"/>
+              <a:rPr lang="en-US"/>
               <a:t>Fourth level</a:t>
             </a:r>
           </a:p>
           <a:p>
             <a:pPr lvl="4"/>
             <a:r>
-              <a:rPr lang="en-US" smtClean="0"/>
+              <a:rPr lang="en-US"/>
               <a:t>Fifth level</a:t>
             </a:r>
-            <a:endParaRPr lang="en-US"/>
           </a:p>
         </p:txBody>
       </p:sp>
@@ -470,7 +482,7 @@
           <a:p>
             <a:fld id="{5BCAD085-E8A6-8845-BD4E-CB4CCA059FC4}" type="datetimeFigureOut">
               <a:rPr lang="en-US" smtClean="0"/>
-              <a:t>1/27/13</a:t>
+              <a:t>8/24/2026</a:t>
             </a:fld>
             <a:endParaRPr lang="en-US"/>
           </a:p>
@@ -569,10 +581,9 @@
           <a:lstStyle/>
           <a:p>
             <a:r>
-              <a:rPr lang="en-US" smtClean="0"/>
+              <a:rPr lang="en-US"/>
               <a:t>Click to edit Master title style</a:t>
             </a:r>
-            <a:endParaRPr lang="en-US"/>
           </a:p>
         </p:txBody>
       </p:sp>
@@ -598,38 +609,37 @@
           <a:p>
             <a:pPr lvl="0"/>
             <a:r>
-              <a:rPr lang="en-US" smtClean="0"/>
+              <a:rPr lang="en-US"/>
               <a:t>Click to edit Master text styles</a:t>
             </a:r>
           </a:p>
           <a:p>
             <a:pPr lvl="1"/>
             <a:r>
-              <a:rPr lang="en-US" smtClean="0"/>
+              <a:rPr lang="en-US"/>
               <a:t>Second level</a:t>
             </a:r>
           </a:p>
           <a:p>
             <a:pPr lvl="2"/>
             <a:r>
-              <a:rPr lang="en-US" smtClean="0"/>
+              <a:rPr lang="en-US"/>
               <a:t>Third level</a:t>
             </a:r>
           </a:p>
           <a:p>
             <a:pPr lvl="3"/>
             <a:r>
-              <a:rPr lang="en-US" smtClean="0"/>
+              <a:rPr lang="en-US"/>
               <a:t>Fourth level</a:t>
             </a:r>
           </a:p>
           <a:p>
             <a:pPr lvl="4"/>
             <a:r>
-              <a:rPr lang="en-US" smtClean="0"/>
+              <a:rPr lang="en-US"/>
               <a:t>Fifth level</a:t>
             </a:r>
-            <a:endParaRPr lang="en-US"/>
           </a:p>
         </p:txBody>
       </p:sp>
@@ -650,7 +660,7 @@
           <a:p>
             <a:fld id="{5BCAD085-E8A6-8845-BD4E-CB4CCA059FC4}" type="datetimeFigureOut">
               <a:rPr lang="en-US" smtClean="0"/>
-              <a:t>1/27/13</a:t>
+              <a:t>8/24/2026</a:t>
             </a:fld>
             <a:endParaRPr lang="en-US"/>
           </a:p>
@@ -744,10 +754,9 @@
           <a:lstStyle/>
           <a:p>
             <a:r>
-              <a:rPr lang="en-US" smtClean="0"/>
+              <a:rPr lang="en-US"/>
               <a:t>Click to edit Master title style</a:t>
             </a:r>
-            <a:endParaRPr lang="en-US"/>
           </a:p>
         </p:txBody>
       </p:sp>
@@ -768,38 +777,37 @@
           <a:p>
             <a:pPr lvl="0"/>
             <a:r>
-              <a:rPr lang="en-US" smtClean="0"/>
+              <a:rPr lang="en-US"/>
               <a:t>Click to edit Master text styles</a:t>
             </a:r>
           </a:p>
           <a:p>
             <a:pPr lvl="1"/>
             <a:r>
-              <a:rPr lang="en-US" smtClean="0"/>
+              <a:rPr lang="en-US"/>
               <a:t>Second level</a:t>
             </a:r>
           </a:p>
           <a:p>
             <a:pPr lvl="2"/>
             <a:r>
-              <a:rPr lang="en-US" smtClean="0"/>
+              <a:rPr lang="en-US"/>
               <a:t>Third level</a:t>
             </a:r>
           </a:p>
           <a:p>
             <a:pPr lvl="3"/>
             <a:r>
-              <a:rPr lang="en-US" smtClean="0"/>
+              <a:rPr lang="en-US"/>
               <a:t>Fourth level</a:t>
             </a:r>
           </a:p>
           <a:p>
             <a:pPr lvl="4"/>
             <a:r>
-              <a:rPr lang="en-US" smtClean="0"/>
+              <a:rPr lang="en-US"/>
               <a:t>Fifth level</a:t>
             </a:r>
-            <a:endParaRPr lang="en-US"/>
           </a:p>
         </p:txBody>
       </p:sp>
@@ -820,7 +828,7 @@
           <a:p>
             <a:fld id="{5BCAD085-E8A6-8845-BD4E-CB4CCA059FC4}" type="datetimeFigureOut">
               <a:rPr lang="en-US" smtClean="0"/>
-              <a:t>1/27/13</a:t>
+              <a:t>8/24/2026</a:t>
             </a:fld>
             <a:endParaRPr lang="en-US"/>
           </a:p>
@@ -923,10 +931,9 @@
           </a:lstStyle>
           <a:p>
             <a:r>
-              <a:rPr lang="en-US" smtClean="0"/>
+              <a:rPr lang="en-US"/>
               <a:t>Click to edit Master title style</a:t>
             </a:r>
-            <a:endParaRPr lang="en-US"/>
           </a:p>
         </p:txBody>
       </p:sp>
@@ -1043,7 +1050,7 @@
           <a:p>
             <a:pPr lvl="0"/>
             <a:r>
-              <a:rPr lang="en-US" smtClean="0"/>
+              <a:rPr lang="en-US"/>
               <a:t>Click to edit Master text styles</a:t>
             </a:r>
           </a:p>
@@ -1066,7 +1073,7 @@
           <a:p>
             <a:fld id="{5BCAD085-E8A6-8845-BD4E-CB4CCA059FC4}" type="datetimeFigureOut">
               <a:rPr lang="en-US" smtClean="0"/>
-              <a:t>1/27/13</a:t>
+              <a:t>8/24/2026</a:t>
             </a:fld>
             <a:endParaRPr lang="en-US"/>
           </a:p>
@@ -1160,10 +1167,9 @@
           <a:lstStyle/>
           <a:p>
             <a:r>
-              <a:rPr lang="en-US" smtClean="0"/>
+              <a:rPr lang="en-US"/>
               <a:t>Click to edit Master title style</a:t>
             </a:r>
-            <a:endParaRPr lang="en-US"/>
           </a:p>
         </p:txBody>
       </p:sp>
@@ -1217,38 +1223,37 @@
           <a:p>
             <a:pPr lvl="0"/>
             <a:r>
-              <a:rPr lang="en-US" smtClean="0"/>
+              <a:rPr lang="en-US"/>
               <a:t>Click to edit Master text styles</a:t>
             </a:r>
           </a:p>
           <a:p>
             <a:pPr lvl="1"/>
             <a:r>
-              <a:rPr lang="en-US" smtClean="0"/>
+              <a:rPr lang="en-US"/>
               <a:t>Second level</a:t>
             </a:r>
           </a:p>
           <a:p>
             <a:pPr lvl="2"/>
             <a:r>
-              <a:rPr lang="en-US" smtClean="0"/>
+              <a:rPr lang="en-US"/>
               <a:t>Third level</a:t>
             </a:r>
           </a:p>
           <a:p>
             <a:pPr lvl="3"/>
             <a:r>
-              <a:rPr lang="en-US" smtClean="0"/>
+              <a:rPr lang="en-US"/>
               <a:t>Fourth level</a:t>
             </a:r>
           </a:p>
           <a:p>
             <a:pPr lvl="4"/>
             <a:r>
-              <a:rPr lang="en-US" smtClean="0"/>
+              <a:rPr lang="en-US"/>
               <a:t>Fifth level</a:t>
             </a:r>
-            <a:endParaRPr lang="en-US"/>
           </a:p>
         </p:txBody>
       </p:sp>
@@ -1302,38 +1307,37 @@
           <a:p>
             <a:pPr lvl="0"/>
             <a:r>
-              <a:rPr lang="en-US" smtClean="0"/>
+              <a:rPr lang="en-US"/>
               <a:t>Click to edit Master text styles</a:t>
             </a:r>
           </a:p>
           <a:p>
             <a:pPr lvl="1"/>
             <a:r>
-              <a:rPr lang="en-US" smtClean="0"/>
+              <a:rPr lang="en-US"/>
               <a:t>Second level</a:t>
             </a:r>
           </a:p>
           <a:p>
             <a:pPr lvl="2"/>
             <a:r>
-              <a:rPr lang="en-US" smtClean="0"/>
+              <a:rPr lang="en-US"/>
               <a:t>Third level</a:t>
             </a:r>
           </a:p>
           <a:p>
             <a:pPr lvl="3"/>
             <a:r>
-              <a:rPr lang="en-US" smtClean="0"/>
+              <a:rPr lang="en-US"/>
               <a:t>Fourth level</a:t>
             </a:r>
           </a:p>
           <a:p>
             <a:pPr lvl="4"/>
             <a:r>
-              <a:rPr lang="en-US" smtClean="0"/>
+              <a:rPr lang="en-US"/>
               <a:t>Fifth level</a:t>
             </a:r>
-            <a:endParaRPr lang="en-US"/>
           </a:p>
         </p:txBody>
       </p:sp>
@@ -1354,7 +1358,7 @@
           <a:p>
             <a:fld id="{5BCAD085-E8A6-8845-BD4E-CB4CCA059FC4}" type="datetimeFigureOut">
               <a:rPr lang="en-US" smtClean="0"/>
-              <a:t>1/27/13</a:t>
+              <a:t>8/24/2026</a:t>
             </a:fld>
             <a:endParaRPr lang="en-US"/>
           </a:p>
@@ -1452,10 +1456,9 @@
           </a:lstStyle>
           <a:p>
             <a:r>
-              <a:rPr lang="en-US" smtClean="0"/>
+              <a:rPr lang="en-US"/>
               <a:t>Click to edit Master title style</a:t>
             </a:r>
-            <a:endParaRPr lang="en-US"/>
           </a:p>
         </p:txBody>
       </p:sp>
@@ -1518,7 +1521,7 @@
           <a:p>
             <a:pPr lvl="0"/>
             <a:r>
-              <a:rPr lang="en-US" smtClean="0"/>
+              <a:rPr lang="en-US"/>
               <a:t>Click to edit Master text styles</a:t>
             </a:r>
           </a:p>
@@ -1574,38 +1577,37 @@
           <a:p>
             <a:pPr lvl="0"/>
             <a:r>
-              <a:rPr lang="en-US" smtClean="0"/>
+              <a:rPr lang="en-US"/>
               <a:t>Click to edit Master text styles</a:t>
             </a:r>
           </a:p>
           <a:p>
             <a:pPr lvl="1"/>
             <a:r>
-              <a:rPr lang="en-US" smtClean="0"/>
+              <a:rPr lang="en-US"/>
               <a:t>Second level</a:t>
             </a:r>
           </a:p>
           <a:p>
             <a:pPr lvl="2"/>
             <a:r>
-              <a:rPr lang="en-US" smtClean="0"/>
+              <a:rPr lang="en-US"/>
               <a:t>Third level</a:t>
             </a:r>
           </a:p>
           <a:p>
             <a:pPr lvl="3"/>
             <a:r>
-              <a:rPr lang="en-US" smtClean="0"/>
+              <a:rPr lang="en-US"/>
               <a:t>Fourth level</a:t>
             </a:r>
           </a:p>
           <a:p>
             <a:pPr lvl="4"/>
             <a:r>
-              <a:rPr lang="en-US" smtClean="0"/>
+              <a:rPr lang="en-US"/>
               <a:t>Fifth level</a:t>
             </a:r>
-            <a:endParaRPr lang="en-US"/>
           </a:p>
         </p:txBody>
       </p:sp>
@@ -1668,7 +1670,7 @@
           <a:p>
             <a:pPr lvl="0"/>
             <a:r>
-              <a:rPr lang="en-US" smtClean="0"/>
+              <a:rPr lang="en-US"/>
               <a:t>Click to edit Master text styles</a:t>
             </a:r>
           </a:p>
@@ -1724,38 +1726,37 @@
           <a:p>
             <a:pPr lvl="0"/>
             <a:r>
-              <a:rPr lang="en-US" smtClean="0"/>
+              <a:rPr lang="en-US"/>
               <a:t>Click to edit Master text styles</a:t>
             </a:r>
           </a:p>
           <a:p>
             <a:pPr lvl="1"/>
             <a:r>
-              <a:rPr lang="en-US" smtClean="0"/>
+              <a:rPr lang="en-US"/>
               <a:t>Second level</a:t>
             </a:r>
           </a:p>
           <a:p>
             <a:pPr lvl="2"/>
             <a:r>
-              <a:rPr lang="en-US" smtClean="0"/>
+              <a:rPr lang="en-US"/>
               <a:t>Third level</a:t>
             </a:r>
           </a:p>
           <a:p>
             <a:pPr lvl="3"/>
             <a:r>
-              <a:rPr lang="en-US" smtClean="0"/>
+              <a:rPr lang="en-US"/>
               <a:t>Fourth level</a:t>
             </a:r>
           </a:p>
           <a:p>
             <a:pPr lvl="4"/>
             <a:r>
-              <a:rPr lang="en-US" smtClean="0"/>
+              <a:rPr lang="en-US"/>
               <a:t>Fifth level</a:t>
             </a:r>
-            <a:endParaRPr lang="en-US"/>
           </a:p>
         </p:txBody>
       </p:sp>
@@ -1776,7 +1777,7 @@
           <a:p>
             <a:fld id="{5BCAD085-E8A6-8845-BD4E-CB4CCA059FC4}" type="datetimeFigureOut">
               <a:rPr lang="en-US" smtClean="0"/>
-              <a:t>1/27/13</a:t>
+              <a:t>8/24/2026</a:t>
             </a:fld>
             <a:endParaRPr lang="en-US"/>
           </a:p>
@@ -1870,10 +1871,9 @@
           <a:lstStyle/>
           <a:p>
             <a:r>
-              <a:rPr lang="en-US" smtClean="0"/>
+              <a:rPr lang="en-US"/>
               <a:t>Click to edit Master title style</a:t>
             </a:r>
-            <a:endParaRPr lang="en-US"/>
           </a:p>
         </p:txBody>
       </p:sp>
@@ -1894,7 +1894,7 @@
           <a:p>
             <a:fld id="{5BCAD085-E8A6-8845-BD4E-CB4CCA059FC4}" type="datetimeFigureOut">
               <a:rPr lang="en-US" smtClean="0"/>
-              <a:t>1/27/13</a:t>
+              <a:t>8/24/2026</a:t>
             </a:fld>
             <a:endParaRPr lang="en-US"/>
           </a:p>
@@ -1989,7 +1989,7 @@
           <a:p>
             <a:fld id="{5BCAD085-E8A6-8845-BD4E-CB4CCA059FC4}" type="datetimeFigureOut">
               <a:rPr lang="en-US" smtClean="0"/>
-              <a:t>1/27/13</a:t>
+              <a:t>8/24/2026</a:t>
             </a:fld>
             <a:endParaRPr lang="en-US"/>
           </a:p>
@@ -2092,10 +2092,9 @@
           </a:lstStyle>
           <a:p>
             <a:r>
-              <a:rPr lang="en-US" smtClean="0"/>
+              <a:rPr lang="en-US"/>
               <a:t>Click to edit Master title style</a:t>
             </a:r>
-            <a:endParaRPr lang="en-US"/>
           </a:p>
         </p:txBody>
       </p:sp>
@@ -2149,38 +2148,37 @@
           <a:p>
             <a:pPr lvl="0"/>
             <a:r>
-              <a:rPr lang="en-US" smtClean="0"/>
+              <a:rPr lang="en-US"/>
               <a:t>Click to edit Master text styles</a:t>
             </a:r>
           </a:p>
           <a:p>
             <a:pPr lvl="1"/>
             <a:r>
-              <a:rPr lang="en-US" smtClean="0"/>
+              <a:rPr lang="en-US"/>
               <a:t>Second level</a:t>
             </a:r>
           </a:p>
           <a:p>
             <a:pPr lvl="2"/>
             <a:r>
-              <a:rPr lang="en-US" smtClean="0"/>
+              <a:rPr lang="en-US"/>
               <a:t>Third level</a:t>
             </a:r>
           </a:p>
           <a:p>
             <a:pPr lvl="3"/>
             <a:r>
-              <a:rPr lang="en-US" smtClean="0"/>
+              <a:rPr lang="en-US"/>
               <a:t>Fourth level</a:t>
             </a:r>
           </a:p>
           <a:p>
             <a:pPr lvl="4"/>
             <a:r>
-              <a:rPr lang="en-US" smtClean="0"/>
+              <a:rPr lang="en-US"/>
               <a:t>Fifth level</a:t>
             </a:r>
-            <a:endParaRPr lang="en-US"/>
           </a:p>
         </p:txBody>
       </p:sp>
@@ -2243,7 +2241,7 @@
           <a:p>
             <a:pPr lvl="0"/>
             <a:r>
-              <a:rPr lang="en-US" smtClean="0"/>
+              <a:rPr lang="en-US"/>
               <a:t>Click to edit Master text styles</a:t>
             </a:r>
           </a:p>
@@ -2266,7 +2264,7 @@
           <a:p>
             <a:fld id="{5BCAD085-E8A6-8845-BD4E-CB4CCA059FC4}" type="datetimeFigureOut">
               <a:rPr lang="en-US" smtClean="0"/>
-              <a:t>1/27/13</a:t>
+              <a:t>8/24/2026</a:t>
             </a:fld>
             <a:endParaRPr lang="en-US"/>
           </a:p>
@@ -2369,10 +2367,9 @@
           </a:lstStyle>
           <a:p>
             <a:r>
-              <a:rPr lang="en-US" smtClean="0"/>
+              <a:rPr lang="en-US"/>
               <a:t>Click to edit Master title style</a:t>
             </a:r>
-            <a:endParaRPr lang="en-US"/>
           </a:p>
         </p:txBody>
       </p:sp>
@@ -2496,7 +2493,7 @@
           <a:p>
             <a:pPr lvl="0"/>
             <a:r>
-              <a:rPr lang="en-US" smtClean="0"/>
+              <a:rPr lang="en-US"/>
               <a:t>Click to edit Master text styles</a:t>
             </a:r>
           </a:p>
@@ -2519,7 +2516,7 @@
           <a:p>
             <a:fld id="{5BCAD085-E8A6-8845-BD4E-CB4CCA059FC4}" type="datetimeFigureOut">
               <a:rPr lang="en-US" smtClean="0"/>
-              <a:t>1/27/13</a:t>
+              <a:t>8/24/2026</a:t>
             </a:fld>
             <a:endParaRPr lang="en-US"/>
           </a:p>
@@ -2628,10 +2625,9 @@
           <a:lstStyle/>
           <a:p>
             <a:r>
-              <a:rPr lang="en-US" smtClean="0"/>
+              <a:rPr lang="en-US"/>
               <a:t>Click to edit Master title style</a:t>
             </a:r>
-            <a:endParaRPr lang="en-US"/>
           </a:p>
         </p:txBody>
       </p:sp>
@@ -2662,38 +2658,37 @@
           <a:p>
             <a:pPr lvl="0"/>
             <a:r>
-              <a:rPr lang="en-US" smtClean="0"/>
+              <a:rPr lang="en-US"/>
               <a:t>Click to edit Master text styles</a:t>
             </a:r>
           </a:p>
           <a:p>
             <a:pPr lvl="1"/>
             <a:r>
-              <a:rPr lang="en-US" smtClean="0"/>
+              <a:rPr lang="en-US"/>
               <a:t>Second level</a:t>
             </a:r>
           </a:p>
           <a:p>
             <a:pPr lvl="2"/>
             <a:r>
-              <a:rPr lang="en-US" smtClean="0"/>
+              <a:rPr lang="en-US"/>
               <a:t>Third level</a:t>
             </a:r>
           </a:p>
           <a:p>
             <a:pPr lvl="3"/>
             <a:r>
-              <a:rPr lang="en-US" smtClean="0"/>
+              <a:rPr lang="en-US"/>
               <a:t>Fourth level</a:t>
             </a:r>
           </a:p>
           <a:p>
             <a:pPr lvl="4"/>
             <a:r>
-              <a:rPr lang="en-US" smtClean="0"/>
+              <a:rPr lang="en-US"/>
               <a:t>Fifth level</a:t>
             </a:r>
-            <a:endParaRPr lang="en-US"/>
           </a:p>
         </p:txBody>
       </p:sp>
@@ -2732,7 +2727,7 @@
           <a:p>
             <a:fld id="{5BCAD085-E8A6-8845-BD4E-CB4CCA059FC4}" type="datetimeFigureOut">
               <a:rPr lang="en-US" smtClean="0"/>
-              <a:t>1/27/13</a:t>
+              <a:t>8/24/2026</a:t>
             </a:fld>
             <a:endParaRPr lang="en-US"/>
           </a:p>
@@ -3091,7 +3086,7 @@
 </file>
 
 <file path=ppt/slides/slide1.xml><?xml version="1.0" encoding="utf-8"?>
-<p:sld xmlns:a="http://schemas.openxmlformats.org/drawingml/2006/main" xmlns:p="http://schemas.openxmlformats.org/presentationml/2006/main" xmlns:r="http://schemas.openxmlformats.org/officeDocument/2006/relationships">
+<p:sld xmlns:a="http://schemas.openxmlformats.org/drawingml/2006/main" xmlns:r="http://schemas.openxmlformats.org/officeDocument/2006/relationships" xmlns:p="http://schemas.openxmlformats.org/presentationml/2006/main">
   <p:cSld>
     <p:spTree>
       <p:nvGrpSpPr>
@@ -3099,7 +3094,14 @@
         <p:cNvGrpSpPr/>
         <p:nvPr/>
       </p:nvGrpSpPr>
-      <p:grpSpPr/>
+      <p:grpSpPr>
+        <a:xfrm>
+          <a:off x="0" y="0"/>
+          <a:ext cx="0" cy="0"/>
+          <a:chOff x="0" y="0"/>
+          <a:chExt cx="0" cy="0"/>
+        </a:xfrm>
+      </p:grpSpPr>
       <p:sp>
         <p:nvSpPr>
           <p:cNvPr id="2" name="Rectangle 1"/>
@@ -3140,6 +3142,7 @@
           <a:lstStyle/>
           <a:p>
             <a:pPr algn="ctr"/>
+            <a:endParaRPr/>
           </a:p>
         </p:txBody>
       </p:sp>
@@ -3183,6 +3186,7 @@
           <a:lstStyle/>
           <a:p>
             <a:pPr algn="ctr"/>
+            <a:endParaRPr/>
           </a:p>
         </p:txBody>
       </p:sp>
@@ -3228,6 +3232,7 @@
           <a:lstStyle/>
           <a:p>
             <a:pPr algn="ctr"/>
+            <a:endParaRPr/>
           </a:p>
         </p:txBody>
       </p:sp>
@@ -3390,6 +3395,7 @@
           <a:lstStyle/>
           <a:p>
             <a:pPr algn="ctr"/>
+            <a:endParaRPr/>
           </a:p>
         </p:txBody>
       </p:sp>
@@ -3485,6 +3491,7 @@
           <a:lstStyle/>
           <a:p>
             <a:pPr algn="ctr"/>
+            <a:endParaRPr/>
           </a:p>
         </p:txBody>
       </p:sp>
@@ -3580,6 +3587,7 @@
           <a:lstStyle/>
           <a:p>
             <a:pPr algn="ctr"/>
+            <a:endParaRPr/>
           </a:p>
         </p:txBody>
       </p:sp>
@@ -3675,6 +3683,7 @@
           <a:lstStyle/>
           <a:p>
             <a:pPr algn="ctr"/>
+            <a:endParaRPr/>
           </a:p>
         </p:txBody>
       </p:sp>
@@ -3737,7 +3746,7 @@
 </file>
 
 <file path=ppt/slides/slide10.xml><?xml version="1.0" encoding="utf-8"?>
-<p:sld xmlns:a="http://schemas.openxmlformats.org/drawingml/2006/main" xmlns:p="http://schemas.openxmlformats.org/presentationml/2006/main" xmlns:r="http://schemas.openxmlformats.org/officeDocument/2006/relationships">
+<p:sld xmlns:a="http://schemas.openxmlformats.org/drawingml/2006/main" xmlns:r="http://schemas.openxmlformats.org/officeDocument/2006/relationships" xmlns:p="http://schemas.openxmlformats.org/presentationml/2006/main">
   <p:cSld>
     <p:spTree>
       <p:nvGrpSpPr>
@@ -3745,7 +3754,14 @@
         <p:cNvGrpSpPr/>
         <p:nvPr/>
       </p:nvGrpSpPr>
-      <p:grpSpPr/>
+      <p:grpSpPr>
+        <a:xfrm>
+          <a:off x="0" y="0"/>
+          <a:ext cx="0" cy="0"/>
+          <a:chOff x="0" y="0"/>
+          <a:chExt cx="0" cy="0"/>
+        </a:xfrm>
+      </p:grpSpPr>
       <p:sp>
         <p:nvSpPr>
           <p:cNvPr id="2" name="Rectangle 1"/>
@@ -3786,6 +3802,7 @@
           <a:lstStyle/>
           <a:p>
             <a:pPr algn="ctr"/>
+            <a:endParaRPr/>
           </a:p>
         </p:txBody>
       </p:sp>
@@ -3829,6 +3846,7 @@
           <a:lstStyle/>
           <a:p>
             <a:pPr algn="ctr"/>
+            <a:endParaRPr/>
           </a:p>
         </p:txBody>
       </p:sp>
@@ -3944,6 +3962,7 @@
           <a:lstStyle/>
           <a:p>
             <a:pPr algn="ctr"/>
+            <a:endParaRPr/>
           </a:p>
         </p:txBody>
       </p:sp>
@@ -3987,6 +4006,7 @@
           <a:lstStyle/>
           <a:p>
             <a:pPr algn="ctr"/>
+            <a:endParaRPr/>
           </a:p>
         </p:txBody>
       </p:sp>
@@ -4114,6 +4134,7 @@
           <a:lstStyle/>
           <a:p>
             <a:pPr algn="ctr"/>
+            <a:endParaRPr/>
           </a:p>
         </p:txBody>
       </p:sp>
@@ -4157,6 +4178,7 @@
           <a:lstStyle/>
           <a:p>
             <a:pPr algn="ctr"/>
+            <a:endParaRPr/>
           </a:p>
         </p:txBody>
       </p:sp>
@@ -4284,6 +4306,7 @@
           <a:lstStyle/>
           <a:p>
             <a:pPr algn="ctr"/>
+            <a:endParaRPr/>
           </a:p>
         </p:txBody>
       </p:sp>
@@ -4327,6 +4350,7 @@
           <a:lstStyle/>
           <a:p>
             <a:pPr algn="ctr"/>
+            <a:endParaRPr/>
           </a:p>
         </p:txBody>
       </p:sp>
@@ -4454,6 +4478,7 @@
           <a:lstStyle/>
           <a:p>
             <a:pPr algn="ctr"/>
+            <a:endParaRPr/>
           </a:p>
         </p:txBody>
       </p:sp>
@@ -4497,6 +4522,7 @@
           <a:lstStyle/>
           <a:p>
             <a:pPr algn="ctr"/>
+            <a:endParaRPr/>
           </a:p>
         </p:txBody>
       </p:sp>
@@ -4624,6 +4650,7 @@
           <a:lstStyle/>
           <a:p>
             <a:pPr algn="ctr"/>
+            <a:endParaRPr/>
           </a:p>
         </p:txBody>
       </p:sp>
@@ -4667,6 +4694,7 @@
           <a:lstStyle/>
           <a:p>
             <a:pPr algn="ctr"/>
+            <a:endParaRPr/>
           </a:p>
         </p:txBody>
       </p:sp>
@@ -4794,6 +4822,7 @@
           <a:lstStyle/>
           <a:p>
             <a:pPr algn="ctr"/>
+            <a:endParaRPr/>
           </a:p>
         </p:txBody>
       </p:sp>
@@ -4837,6 +4866,7 @@
           <a:lstStyle/>
           <a:p>
             <a:pPr algn="ctr"/>
+            <a:endParaRPr/>
           </a:p>
         </p:txBody>
       </p:sp>
@@ -4931,7 +4961,7 @@
 </file>
 
 <file path=ppt/slides/slide11.xml><?xml version="1.0" encoding="utf-8"?>
-<p:sld xmlns:a="http://schemas.openxmlformats.org/drawingml/2006/main" xmlns:p="http://schemas.openxmlformats.org/presentationml/2006/main" xmlns:r="http://schemas.openxmlformats.org/officeDocument/2006/relationships">
+<p:sld xmlns:a="http://schemas.openxmlformats.org/drawingml/2006/main" xmlns:r="http://schemas.openxmlformats.org/officeDocument/2006/relationships" xmlns:p="http://schemas.openxmlformats.org/presentationml/2006/main">
   <p:cSld>
     <p:spTree>
       <p:nvGrpSpPr>
@@ -4939,7 +4969,14 @@
         <p:cNvGrpSpPr/>
         <p:nvPr/>
       </p:nvGrpSpPr>
-      <p:grpSpPr/>
+      <p:grpSpPr>
+        <a:xfrm>
+          <a:off x="0" y="0"/>
+          <a:ext cx="0" cy="0"/>
+          <a:chOff x="0" y="0"/>
+          <a:chExt cx="0" cy="0"/>
+        </a:xfrm>
+      </p:grpSpPr>
       <p:sp>
         <p:nvSpPr>
           <p:cNvPr id="2" name="Rectangle 1"/>
@@ -4980,6 +5017,7 @@
           <a:lstStyle/>
           <a:p>
             <a:pPr algn="ctr"/>
+            <a:endParaRPr/>
           </a:p>
         </p:txBody>
       </p:sp>
@@ -5023,6 +5061,7 @@
           <a:lstStyle/>
           <a:p>
             <a:pPr algn="ctr"/>
+            <a:endParaRPr/>
           </a:p>
         </p:txBody>
       </p:sp>
@@ -5138,6 +5177,7 @@
           <a:lstStyle/>
           <a:p>
             <a:pPr algn="ctr"/>
+            <a:endParaRPr/>
           </a:p>
         </p:txBody>
       </p:sp>
@@ -5318,6 +5358,7 @@
           <a:lstStyle/>
           <a:p>
             <a:pPr algn="ctr"/>
+            <a:endParaRPr/>
           </a:p>
         </p:txBody>
       </p:sp>
@@ -5498,6 +5539,7 @@
           <a:lstStyle/>
           <a:p>
             <a:pPr algn="ctr"/>
+            <a:endParaRPr/>
           </a:p>
         </p:txBody>
       </p:sp>
@@ -5678,6 +5720,7 @@
           <a:lstStyle/>
           <a:p>
             <a:pPr algn="ctr"/>
+            <a:endParaRPr/>
           </a:p>
         </p:txBody>
       </p:sp>
@@ -5825,7 +5868,7 @@
 </file>
 
 <file path=ppt/slides/slide12.xml><?xml version="1.0" encoding="utf-8"?>
-<p:sld xmlns:a="http://schemas.openxmlformats.org/drawingml/2006/main" xmlns:p="http://schemas.openxmlformats.org/presentationml/2006/main" xmlns:r="http://schemas.openxmlformats.org/officeDocument/2006/relationships">
+<p:sld xmlns:a="http://schemas.openxmlformats.org/drawingml/2006/main" xmlns:r="http://schemas.openxmlformats.org/officeDocument/2006/relationships" xmlns:p="http://schemas.openxmlformats.org/presentationml/2006/main">
   <p:cSld>
     <p:spTree>
       <p:nvGrpSpPr>
@@ -5833,7 +5876,14 @@
         <p:cNvGrpSpPr/>
         <p:nvPr/>
       </p:nvGrpSpPr>
-      <p:grpSpPr/>
+      <p:grpSpPr>
+        <a:xfrm>
+          <a:off x="0" y="0"/>
+          <a:ext cx="0" cy="0"/>
+          <a:chOff x="0" y="0"/>
+          <a:chExt cx="0" cy="0"/>
+        </a:xfrm>
+      </p:grpSpPr>
       <p:sp>
         <p:nvSpPr>
           <p:cNvPr id="2" name="Rectangle 1"/>
@@ -5874,6 +5924,7 @@
           <a:lstStyle/>
           <a:p>
             <a:pPr algn="ctr"/>
+            <a:endParaRPr/>
           </a:p>
         </p:txBody>
       </p:sp>
@@ -5917,6 +5968,7 @@
           <a:lstStyle/>
           <a:p>
             <a:pPr algn="ctr"/>
+            <a:endParaRPr/>
           </a:p>
         </p:txBody>
       </p:sp>
@@ -6032,6 +6084,7 @@
           <a:lstStyle/>
           <a:p>
             <a:pPr algn="ctr"/>
+            <a:endParaRPr/>
           </a:p>
         </p:txBody>
       </p:sp>
@@ -6218,6 +6271,7 @@
           <a:lstStyle/>
           <a:p>
             <a:pPr algn="ctr"/>
+            <a:endParaRPr/>
           </a:p>
         </p:txBody>
       </p:sp>
@@ -6404,6 +6458,7 @@
           <a:lstStyle/>
           <a:p>
             <a:pPr algn="ctr"/>
+            <a:endParaRPr/>
           </a:p>
         </p:txBody>
       </p:sp>
@@ -6590,6 +6645,7 @@
           <a:lstStyle/>
           <a:p>
             <a:pPr algn="ctr"/>
+            <a:endParaRPr/>
           </a:p>
         </p:txBody>
       </p:sp>
@@ -6743,7 +6799,7 @@
 </file>
 
 <file path=ppt/slides/slide13.xml><?xml version="1.0" encoding="utf-8"?>
-<p:sld xmlns:a="http://schemas.openxmlformats.org/drawingml/2006/main" xmlns:p="http://schemas.openxmlformats.org/presentationml/2006/main" xmlns:r="http://schemas.openxmlformats.org/officeDocument/2006/relationships">
+<p:sld xmlns:a="http://schemas.openxmlformats.org/drawingml/2006/main" xmlns:r="http://schemas.openxmlformats.org/officeDocument/2006/relationships" xmlns:p="http://schemas.openxmlformats.org/presentationml/2006/main">
   <p:cSld>
     <p:spTree>
       <p:nvGrpSpPr>
@@ -6751,7 +6807,14 @@
         <p:cNvGrpSpPr/>
         <p:nvPr/>
       </p:nvGrpSpPr>
-      <p:grpSpPr/>
+      <p:grpSpPr>
+        <a:xfrm>
+          <a:off x="0" y="0"/>
+          <a:ext cx="0" cy="0"/>
+          <a:chOff x="0" y="0"/>
+          <a:chExt cx="0" cy="0"/>
+        </a:xfrm>
+      </p:grpSpPr>
       <p:sp>
         <p:nvSpPr>
           <p:cNvPr id="2" name="Rectangle 1"/>
@@ -6792,6 +6855,7 @@
           <a:lstStyle/>
           <a:p>
             <a:pPr algn="ctr"/>
+            <a:endParaRPr/>
           </a:p>
         </p:txBody>
       </p:sp>
@@ -6835,6 +6899,7 @@
           <a:lstStyle/>
           <a:p>
             <a:pPr algn="ctr"/>
+            <a:endParaRPr/>
           </a:p>
         </p:txBody>
       </p:sp>
@@ -6880,6 +6945,7 @@
           <a:lstStyle/>
           <a:p>
             <a:pPr algn="ctr"/>
+            <a:endParaRPr/>
           </a:p>
         </p:txBody>
       </p:sp>
@@ -6960,6 +7026,7 @@
           <a:lstStyle/>
           <a:p>
             <a:pPr algn="ctr"/>
+            <a:endParaRPr/>
           </a:p>
         </p:txBody>
       </p:sp>
@@ -7133,6 +7200,7 @@
           <a:lstStyle/>
           <a:p>
             <a:pPr algn="ctr"/>
+            <a:endParaRPr/>
           </a:p>
         </p:txBody>
       </p:sp>
@@ -7258,7 +7326,7 @@
 </file>
 
 <file path=ppt/slides/slide2.xml><?xml version="1.0" encoding="utf-8"?>
-<p:sld xmlns:a="http://schemas.openxmlformats.org/drawingml/2006/main" xmlns:p="http://schemas.openxmlformats.org/presentationml/2006/main" xmlns:r="http://schemas.openxmlformats.org/officeDocument/2006/relationships">
+<p:sld xmlns:a="http://schemas.openxmlformats.org/drawingml/2006/main" xmlns:r="http://schemas.openxmlformats.org/officeDocument/2006/relationships" xmlns:p="http://schemas.openxmlformats.org/presentationml/2006/main">
   <p:cSld>
     <p:spTree>
       <p:nvGrpSpPr>
@@ -7266,7 +7334,14 @@
         <p:cNvGrpSpPr/>
         <p:nvPr/>
       </p:nvGrpSpPr>
-      <p:grpSpPr/>
+      <p:grpSpPr>
+        <a:xfrm>
+          <a:off x="0" y="0"/>
+          <a:ext cx="0" cy="0"/>
+          <a:chOff x="0" y="0"/>
+          <a:chExt cx="0" cy="0"/>
+        </a:xfrm>
+      </p:grpSpPr>
       <p:sp>
         <p:nvSpPr>
           <p:cNvPr id="2" name="Rectangle 1"/>
@@ -7307,6 +7382,7 @@
           <a:lstStyle/>
           <a:p>
             <a:pPr algn="ctr"/>
+            <a:endParaRPr/>
           </a:p>
         </p:txBody>
       </p:sp>
@@ -7350,6 +7426,7 @@
           <a:lstStyle/>
           <a:p>
             <a:pPr algn="ctr"/>
+            <a:endParaRPr/>
           </a:p>
         </p:txBody>
       </p:sp>
@@ -7465,6 +7542,7 @@
           <a:lstStyle/>
           <a:p>
             <a:pPr algn="ctr"/>
+            <a:endParaRPr/>
           </a:p>
         </p:txBody>
       </p:sp>
@@ -7630,6 +7708,7 @@
           <a:lstStyle/>
           <a:p>
             <a:pPr algn="ctr"/>
+            <a:endParaRPr/>
           </a:p>
         </p:txBody>
       </p:sp>
@@ -7795,6 +7874,7 @@
           <a:lstStyle/>
           <a:p>
             <a:pPr algn="ctr"/>
+            <a:endParaRPr/>
           </a:p>
         </p:txBody>
       </p:sp>
@@ -7927,7 +8007,7 @@
 </file>
 
 <file path=ppt/slides/slide3.xml><?xml version="1.0" encoding="utf-8"?>
-<p:sld xmlns:a="http://schemas.openxmlformats.org/drawingml/2006/main" xmlns:p="http://schemas.openxmlformats.org/presentationml/2006/main" xmlns:r="http://schemas.openxmlformats.org/officeDocument/2006/relationships">
+<p:sld xmlns:a="http://schemas.openxmlformats.org/drawingml/2006/main" xmlns:r="http://schemas.openxmlformats.org/officeDocument/2006/relationships" xmlns:p="http://schemas.openxmlformats.org/presentationml/2006/main">
   <p:cSld>
     <p:spTree>
       <p:nvGrpSpPr>
@@ -7935,7 +8015,14 @@
         <p:cNvGrpSpPr/>
         <p:nvPr/>
       </p:nvGrpSpPr>
-      <p:grpSpPr/>
+      <p:grpSpPr>
+        <a:xfrm>
+          <a:off x="0" y="0"/>
+          <a:ext cx="0" cy="0"/>
+          <a:chOff x="0" y="0"/>
+          <a:chExt cx="0" cy="0"/>
+        </a:xfrm>
+      </p:grpSpPr>
       <p:sp>
         <p:nvSpPr>
           <p:cNvPr id="2" name="Rectangle 1"/>
@@ -7976,6 +8063,7 @@
           <a:lstStyle/>
           <a:p>
             <a:pPr algn="ctr"/>
+            <a:endParaRPr/>
           </a:p>
         </p:txBody>
       </p:sp>
@@ -8019,6 +8107,7 @@
           <a:lstStyle/>
           <a:p>
             <a:pPr algn="ctr"/>
+            <a:endParaRPr/>
           </a:p>
         </p:txBody>
       </p:sp>
@@ -8134,6 +8223,7 @@
           <a:lstStyle/>
           <a:p>
             <a:pPr algn="ctr"/>
+            <a:endParaRPr/>
           </a:p>
         </p:txBody>
       </p:sp>
@@ -8311,6 +8401,7 @@
           <a:lstStyle/>
           <a:p>
             <a:pPr algn="ctr"/>
+            <a:endParaRPr/>
           </a:p>
         </p:txBody>
       </p:sp>
@@ -8488,6 +8579,7 @@
           <a:lstStyle/>
           <a:p>
             <a:pPr algn="ctr"/>
+            <a:endParaRPr/>
           </a:p>
         </p:txBody>
       </p:sp>
@@ -8632,7 +8724,7 @@
 </file>
 
 <file path=ppt/slides/slide4.xml><?xml version="1.0" encoding="utf-8"?>
-<p:sld xmlns:a="http://schemas.openxmlformats.org/drawingml/2006/main" xmlns:p="http://schemas.openxmlformats.org/presentationml/2006/main" xmlns:r="http://schemas.openxmlformats.org/officeDocument/2006/relationships">
+<p:sld xmlns:a="http://schemas.openxmlformats.org/drawingml/2006/main" xmlns:r="http://schemas.openxmlformats.org/officeDocument/2006/relationships" xmlns:p="http://schemas.openxmlformats.org/presentationml/2006/main">
   <p:cSld>
     <p:spTree>
       <p:nvGrpSpPr>
@@ -8640,7 +8732,14 @@
         <p:cNvGrpSpPr/>
         <p:nvPr/>
       </p:nvGrpSpPr>
-      <p:grpSpPr/>
+      <p:grpSpPr>
+        <a:xfrm>
+          <a:off x="0" y="0"/>
+          <a:ext cx="0" cy="0"/>
+          <a:chOff x="0" y="0"/>
+          <a:chExt cx="0" cy="0"/>
+        </a:xfrm>
+      </p:grpSpPr>
       <p:sp>
         <p:nvSpPr>
           <p:cNvPr id="2" name="Rectangle 1"/>
@@ -8681,6 +8780,7 @@
           <a:lstStyle/>
           <a:p>
             <a:pPr algn="ctr"/>
+            <a:endParaRPr/>
           </a:p>
         </p:txBody>
       </p:sp>
@@ -8724,6 +8824,7 @@
           <a:lstStyle/>
           <a:p>
             <a:pPr algn="ctr"/>
+            <a:endParaRPr/>
           </a:p>
         </p:txBody>
       </p:sp>
@@ -8839,6 +8940,7 @@
           <a:lstStyle/>
           <a:p>
             <a:pPr algn="ctr"/>
+            <a:endParaRPr/>
           </a:p>
         </p:txBody>
       </p:sp>
@@ -8931,6 +9033,7 @@
           <a:lstStyle/>
           <a:p>
             <a:pPr algn="ctr"/>
+            <a:endParaRPr/>
           </a:p>
         </p:txBody>
       </p:sp>
@@ -9023,6 +9126,7 @@
           <a:lstStyle/>
           <a:p>
             <a:pPr algn="ctr"/>
+            <a:endParaRPr/>
           </a:p>
         </p:txBody>
       </p:sp>
@@ -9115,6 +9219,7 @@
           <a:lstStyle/>
           <a:p>
             <a:pPr algn="ctr"/>
+            <a:endParaRPr/>
           </a:p>
         </p:txBody>
       </p:sp>
@@ -9207,6 +9312,7 @@
           <a:lstStyle/>
           <a:p>
             <a:pPr algn="ctr"/>
+            <a:endParaRPr/>
           </a:p>
         </p:txBody>
       </p:sp>
@@ -9299,6 +9405,7 @@
           <a:lstStyle/>
           <a:p>
             <a:pPr algn="ctr"/>
+            <a:endParaRPr/>
           </a:p>
         </p:txBody>
       </p:sp>
@@ -9391,6 +9498,7 @@
           <a:lstStyle/>
           <a:p>
             <a:pPr algn="ctr"/>
+            <a:endParaRPr/>
           </a:p>
         </p:txBody>
       </p:sp>
@@ -9483,6 +9591,7 @@
           <a:lstStyle/>
           <a:p>
             <a:pPr algn="ctr"/>
+            <a:endParaRPr/>
           </a:p>
         </p:txBody>
       </p:sp>
@@ -9542,7 +9651,7 @@
 </file>
 
 <file path=ppt/slides/slide5.xml><?xml version="1.0" encoding="utf-8"?>
-<p:sld xmlns:a="http://schemas.openxmlformats.org/drawingml/2006/main" xmlns:p="http://schemas.openxmlformats.org/presentationml/2006/main" xmlns:r="http://schemas.openxmlformats.org/officeDocument/2006/relationships">
+<p:sld xmlns:a="http://schemas.openxmlformats.org/drawingml/2006/main" xmlns:r="http://schemas.openxmlformats.org/officeDocument/2006/relationships" xmlns:p="http://schemas.openxmlformats.org/presentationml/2006/main">
   <p:cSld>
     <p:spTree>
       <p:nvGrpSpPr>
@@ -9550,7 +9659,14 @@
         <p:cNvGrpSpPr/>
         <p:nvPr/>
       </p:nvGrpSpPr>
-      <p:grpSpPr/>
+      <p:grpSpPr>
+        <a:xfrm>
+          <a:off x="0" y="0"/>
+          <a:ext cx="0" cy="0"/>
+          <a:chOff x="0" y="0"/>
+          <a:chExt cx="0" cy="0"/>
+        </a:xfrm>
+      </p:grpSpPr>
       <p:sp>
         <p:nvSpPr>
           <p:cNvPr id="2" name="Rectangle 1"/>
@@ -9591,6 +9707,7 @@
           <a:lstStyle/>
           <a:p>
             <a:pPr algn="ctr"/>
+            <a:endParaRPr/>
           </a:p>
         </p:txBody>
       </p:sp>
@@ -9634,6 +9751,7 @@
           <a:lstStyle/>
           <a:p>
             <a:pPr algn="ctr"/>
+            <a:endParaRPr/>
           </a:p>
         </p:txBody>
       </p:sp>
@@ -9749,6 +9867,7 @@
           <a:lstStyle/>
           <a:p>
             <a:pPr algn="ctr"/>
+            <a:endParaRPr/>
           </a:p>
         </p:txBody>
       </p:sp>
@@ -9941,6 +10060,7 @@
           <a:lstStyle/>
           <a:p>
             <a:pPr algn="ctr"/>
+            <a:endParaRPr/>
           </a:p>
         </p:txBody>
       </p:sp>
@@ -10133,6 +10253,7 @@
           <a:lstStyle/>
           <a:p>
             <a:pPr algn="ctr"/>
+            <a:endParaRPr/>
           </a:p>
         </p:txBody>
       </p:sp>
@@ -10323,6 +10444,7 @@
           <a:lstStyle/>
           <a:p>
             <a:pPr algn="ctr"/>
+            <a:endParaRPr/>
           </a:p>
         </p:txBody>
       </p:sp>
@@ -10382,7 +10504,7 @@
 </file>
 
 <file path=ppt/slides/slide6.xml><?xml version="1.0" encoding="utf-8"?>
-<p:sld xmlns:a="http://schemas.openxmlformats.org/drawingml/2006/main" xmlns:p="http://schemas.openxmlformats.org/presentationml/2006/main" xmlns:r="http://schemas.openxmlformats.org/officeDocument/2006/relationships">
+<p:sld xmlns:a="http://schemas.openxmlformats.org/drawingml/2006/main" xmlns:r="http://schemas.openxmlformats.org/officeDocument/2006/relationships" xmlns:p="http://schemas.openxmlformats.org/presentationml/2006/main">
   <p:cSld>
     <p:spTree>
       <p:nvGrpSpPr>
@@ -10390,7 +10512,14 @@
         <p:cNvGrpSpPr/>
         <p:nvPr/>
       </p:nvGrpSpPr>
-      <p:grpSpPr/>
+      <p:grpSpPr>
+        <a:xfrm>
+          <a:off x="0" y="0"/>
+          <a:ext cx="0" cy="0"/>
+          <a:chOff x="0" y="0"/>
+          <a:chExt cx="0" cy="0"/>
+        </a:xfrm>
+      </p:grpSpPr>
       <p:sp>
         <p:nvSpPr>
           <p:cNvPr id="2" name="Rectangle 1"/>
@@ -10431,6 +10560,7 @@
           <a:lstStyle/>
           <a:p>
             <a:pPr algn="ctr"/>
+            <a:endParaRPr/>
           </a:p>
         </p:txBody>
       </p:sp>
@@ -10474,6 +10604,7 @@
           <a:lstStyle/>
           <a:p>
             <a:pPr algn="ctr"/>
+            <a:endParaRPr/>
           </a:p>
         </p:txBody>
       </p:sp>
@@ -10589,6 +10720,7 @@
           <a:lstStyle/>
           <a:p>
             <a:pPr algn="ctr"/>
+            <a:endParaRPr/>
           </a:p>
         </p:txBody>
       </p:sp>
@@ -10834,6 +10966,7 @@
           <a:lstStyle/>
           <a:p>
             <a:pPr algn="ctr"/>
+            <a:endParaRPr/>
           </a:p>
         </p:txBody>
       </p:sp>
@@ -11046,7 +11179,7 @@
 </file>
 
 <file path=ppt/slides/slide7.xml><?xml version="1.0" encoding="utf-8"?>
-<p:sld xmlns:a="http://schemas.openxmlformats.org/drawingml/2006/main" xmlns:p="http://schemas.openxmlformats.org/presentationml/2006/main" xmlns:r="http://schemas.openxmlformats.org/officeDocument/2006/relationships">
+<p:sld xmlns:a="http://schemas.openxmlformats.org/drawingml/2006/main" xmlns:r="http://schemas.openxmlformats.org/officeDocument/2006/relationships" xmlns:p="http://schemas.openxmlformats.org/presentationml/2006/main">
   <p:cSld>
     <p:spTree>
       <p:nvGrpSpPr>
@@ -11054,7 +11187,14 @@
         <p:cNvGrpSpPr/>
         <p:nvPr/>
       </p:nvGrpSpPr>
-      <p:grpSpPr/>
+      <p:grpSpPr>
+        <a:xfrm>
+          <a:off x="0" y="0"/>
+          <a:ext cx="0" cy="0"/>
+          <a:chOff x="0" y="0"/>
+          <a:chExt cx="0" cy="0"/>
+        </a:xfrm>
+      </p:grpSpPr>
       <p:sp>
         <p:nvSpPr>
           <p:cNvPr id="2" name="Rectangle 1"/>
@@ -11095,6 +11235,7 @@
           <a:lstStyle/>
           <a:p>
             <a:pPr algn="ctr"/>
+            <a:endParaRPr/>
           </a:p>
         </p:txBody>
       </p:sp>
@@ -11138,6 +11279,7 @@
           <a:lstStyle/>
           <a:p>
             <a:pPr algn="ctr"/>
+            <a:endParaRPr/>
           </a:p>
         </p:txBody>
       </p:sp>
@@ -11253,6 +11395,7 @@
           <a:lstStyle/>
           <a:p>
             <a:pPr algn="ctr"/>
+            <a:endParaRPr/>
           </a:p>
         </p:txBody>
       </p:sp>
@@ -11418,6 +11561,7 @@
           <a:lstStyle/>
           <a:p>
             <a:pPr algn="ctr"/>
+            <a:endParaRPr/>
           </a:p>
         </p:txBody>
       </p:sp>
@@ -11583,6 +11727,7 @@
           <a:lstStyle/>
           <a:p>
             <a:pPr algn="ctr"/>
+            <a:endParaRPr/>
           </a:p>
         </p:txBody>
       </p:sp>
@@ -11748,6 +11893,7 @@
           <a:lstStyle/>
           <a:p>
             <a:pPr algn="ctr"/>
+            <a:endParaRPr/>
           </a:p>
         </p:txBody>
       </p:sp>
@@ -11880,7 +12026,7 @@
 </file>
 
 <file path=ppt/slides/slide8.xml><?xml version="1.0" encoding="utf-8"?>
-<p:sld xmlns:a="http://schemas.openxmlformats.org/drawingml/2006/main" xmlns:p="http://schemas.openxmlformats.org/presentationml/2006/main" xmlns:r="http://schemas.openxmlformats.org/officeDocument/2006/relationships">
+<p:sld xmlns:a="http://schemas.openxmlformats.org/drawingml/2006/main" xmlns:r="http://schemas.openxmlformats.org/officeDocument/2006/relationships" xmlns:p="http://schemas.openxmlformats.org/presentationml/2006/main">
   <p:cSld>
     <p:spTree>
       <p:nvGrpSpPr>
@@ -11888,7 +12034,14 @@
         <p:cNvGrpSpPr/>
         <p:nvPr/>
       </p:nvGrpSpPr>
-      <p:grpSpPr/>
+      <p:grpSpPr>
+        <a:xfrm>
+          <a:off x="0" y="0"/>
+          <a:ext cx="0" cy="0"/>
+          <a:chOff x="0" y="0"/>
+          <a:chExt cx="0" cy="0"/>
+        </a:xfrm>
+      </p:grpSpPr>
       <p:sp>
         <p:nvSpPr>
           <p:cNvPr id="2" name="Rectangle 1"/>
@@ -11929,6 +12082,7 @@
           <a:lstStyle/>
           <a:p>
             <a:pPr algn="ctr"/>
+            <a:endParaRPr/>
           </a:p>
         </p:txBody>
       </p:sp>
@@ -11972,6 +12126,7 @@
           <a:lstStyle/>
           <a:p>
             <a:pPr algn="ctr"/>
+            <a:endParaRPr/>
           </a:p>
         </p:txBody>
       </p:sp>
@@ -12087,6 +12242,7 @@
           <a:lstStyle/>
           <a:p>
             <a:pPr algn="ctr"/>
+            <a:endParaRPr/>
           </a:p>
         </p:txBody>
       </p:sp>
@@ -12252,6 +12408,7 @@
           <a:lstStyle/>
           <a:p>
             <a:pPr algn="ctr"/>
+            <a:endParaRPr/>
           </a:p>
         </p:txBody>
       </p:sp>
@@ -12417,6 +12574,7 @@
           <a:lstStyle/>
           <a:p>
             <a:pPr algn="ctr"/>
+            <a:endParaRPr/>
           </a:p>
         </p:txBody>
       </p:sp>
@@ -12549,7 +12707,7 @@
 </file>
 
 <file path=ppt/slides/slide9.xml><?xml version="1.0" encoding="utf-8"?>
-<p:sld xmlns:a="http://schemas.openxmlformats.org/drawingml/2006/main" xmlns:p="http://schemas.openxmlformats.org/presentationml/2006/main" xmlns:r="http://schemas.openxmlformats.org/officeDocument/2006/relationships">
+<p:sld xmlns:a="http://schemas.openxmlformats.org/drawingml/2006/main" xmlns:r="http://schemas.openxmlformats.org/officeDocument/2006/relationships" xmlns:p="http://schemas.openxmlformats.org/presentationml/2006/main">
   <p:cSld>
     <p:spTree>
       <p:nvGrpSpPr>
@@ -12557,7 +12715,14 @@
         <p:cNvGrpSpPr/>
         <p:nvPr/>
       </p:nvGrpSpPr>
-      <p:grpSpPr/>
+      <p:grpSpPr>
+        <a:xfrm>
+          <a:off x="0" y="0"/>
+          <a:ext cx="0" cy="0"/>
+          <a:chOff x="0" y="0"/>
+          <a:chExt cx="0" cy="0"/>
+        </a:xfrm>
+      </p:grpSpPr>
       <p:sp>
         <p:nvSpPr>
           <p:cNvPr id="2" name="Rectangle 1"/>
@@ -12598,6 +12763,7 @@
           <a:lstStyle/>
           <a:p>
             <a:pPr algn="ctr"/>
+            <a:endParaRPr/>
           </a:p>
         </p:txBody>
       </p:sp>
@@ -12641,6 +12807,7 @@
           <a:lstStyle/>
           <a:p>
             <a:pPr algn="ctr"/>
+            <a:endParaRPr/>
           </a:p>
         </p:txBody>
       </p:sp>
@@ -12756,6 +12923,7 @@
           <a:lstStyle/>
           <a:p>
             <a:pPr algn="ctr"/>
+            <a:endParaRPr/>
           </a:p>
         </p:txBody>
       </p:sp>
@@ -12911,6 +13079,7 @@
           <a:lstStyle/>
           <a:p>
             <a:pPr algn="ctr"/>
+            <a:endParaRPr/>
           </a:p>
         </p:txBody>
       </p:sp>
@@ -13066,6 +13235,7 @@
           <a:lstStyle/>
           <a:p>
             <a:pPr algn="ctr"/>
+            <a:endParaRPr/>
           </a:p>
         </p:txBody>
       </p:sp>
@@ -13236,6 +13406,7 @@
           <a:lstStyle/>
           <a:p>
             <a:pPr algn="ctr"/>
+            <a:endParaRPr/>
           </a:p>
         </p:txBody>
       </p:sp>
@@ -13406,6 +13577,7 @@
           <a:lstStyle/>
           <a:p>
             <a:pPr algn="ctr"/>
+            <a:endParaRPr/>
           </a:p>
         </p:txBody>
       </p:sp>
@@ -13576,6 +13748,7 @@
           <a:lstStyle/>
           <a:p>
             <a:pPr algn="ctr"/>
+            <a:endParaRPr/>
           </a:p>
         </p:txBody>
       </p:sp>
